--- a/docs/roadmap_2026-08.pptx
+++ b/docs/roadmap_2026-08.pptx
@@ -7863,7 +7863,7 @@
                             <a:srgbClr val="14181D"/>
                           </a:solidFill>
                         </a:rPr>
-                        <a:t>가림 시 score 급락 감지 → 트랙 동결·복구 (오검출 좌표 발행 방지)</a:t>
+                        <a:t>이중 신호(score 급락 + depth 침입) 감지 → 트랙 동결·재식별. ID 유지, 복귀 중앙값 0.3s</a:t>
                       </a:r>
                     </a:p>
                   </a:txBody>
@@ -7884,7 +7884,7 @@
                             <a:srgbClr val="14181D"/>
                           </a:solidFill>
                         </a:rPr>
-                        <a:t>가림 bag 녹화 (8/11 예정)</a:t>
+                        <a:t>—</a:t>
                       </a:r>
                     </a:p>
                   </a:txBody>
@@ -7905,7 +7905,7 @@
                             <a:srgbClr val="14181D"/>
                           </a:solidFill>
                         </a:rPr>
-                        <a:t>8/11~13</a:t>
+                        <a:t>✅ 8/11 완료</a:t>
                       </a:r>
                     </a:p>
                   </a:txBody>
@@ -7928,7 +7928,7 @@
                             <a:srgbClr val="14181D"/>
                           </a:solidFill>
                         </a:rPr>
-                        <a:t>칼만 지연 보정</a:t>
+                        <a:t>칼만 coasting</a:t>
                       </a:r>
                     </a:p>
                   </a:txBody>
@@ -7949,7 +7949,7 @@
                             <a:srgbClr val="14181D"/>
                           </a:solidFill>
                         </a:rPr>
-                        <a:t>이동 물체 위치 지연(~2cm) 제거 + 그립 시점 위치 예측</a:t>
+                        <a:t>이동 중 가림 대응(가림 중 예측 주행) + 그립 시점 위치 예측. 위치 지연은 실측 2.5~7mm로 미미</a:t>
                       </a:r>
                     </a:p>
                   </a:txBody>
@@ -7970,7 +7970,7 @@
                             <a:srgbClr val="14181D"/>
                           </a:solidFill>
                         </a:rPr>
-                        <a:t>지연 제거는 즉시 가능, 예측은 로봇 사양 필요</a:t>
+                        <a:t>전동 컨베이어 bag + 로봇 사양 확보 시</a:t>
                       </a:r>
                     </a:p>
                   </a:txBody>
@@ -7991,7 +7991,7 @@
                             <a:srgbClr val="14181D"/>
                           </a:solidFill>
                         </a:rPr>
-                        <a:t>8/13~15 + 9월 튜닝</a:t>
+                        <a:t>9월 (로봇 연동 주간)</a:t>
                       </a:r>
                     </a:p>
                   </a:txBody>
@@ -9044,7 +9044,7 @@
                   <a:srgbClr val="1F8F4D"/>
                 </a:solidFill>
               </a:rPr>
-              <a:t>가림 대응 + 칼만 (8/11~15)</a:t>
+              <a:t>가림 대응 ✅ 완료 (8/11)</a:t>
             </a:r>
           </a:p>
         </p:txBody>
@@ -9210,7 +9210,7 @@
                   <a:srgbClr val="2A78D6"/>
                 </a:solidFill>
               </a:rPr>
-              <a:t>실물 검증·ROS2 연동 (WBS 7.3~7.5 정렬)</a:t>
+              <a:t>실물 검증·ROS2 연동 + 칼만 coasting (WBS 7.3~7.5)</a:t>
             </a:r>
           </a:p>
         </p:txBody>
